--- a/ws02/class/ws02_slide_class5.pptx
+++ b/ws02/class/ws02_slide_class5.pptx
@@ -260,7 +260,7 @@
 </file>
 
 <file path=ppt/notesSlides/notesSlide1.xml><?xml version="1.0" encoding="utf-8"?>
-<p:notes xmlns:a="http://schemas.openxmlformats.org/drawingml/2006/main" xmlns:r="http://schemas.openxmlformats.org/officeDocument/2006/relationships" xmlns:p="http://schemas.openxmlformats.org/presentationml/2006/main" showMasterSp="0" showMasterPhAnim="0">
+<p:notes xmlns:a="http://schemas.openxmlformats.org/drawingml/2006/main" xmlns:p="http://schemas.openxmlformats.org/presentationml/2006/main" showMasterSp="0" showMasterPhAnim="0">
   <p:cSld>
     <p:spTree>
       <p:nvGrpSpPr>
@@ -356,20 +356,7 @@
           </a:bodyPr>
           <a:lstStyle/>
           <a:p>
-            <a:pPr marL="0" lvl="0" indent="0" algn="l" rtl="0">
-              <a:lnSpc>
-                <a:spcPct val="100000"/>
-              </a:lnSpc>
-              <a:spcBef>
-                <a:spcPts val="0"/>
-              </a:spcBef>
-              <a:spcAft>
-                <a:spcPts val="0"/>
-              </a:spcAft>
-              <a:buSzPts val="1100"/>
-              <a:buNone/>
-            </a:pPr>
-            <a:endParaRPr/>
+            <a:endParaRPr dirty="0"/>
           </a:p>
         </p:txBody>
       </p:sp>
@@ -382,7 +369,7 @@
 </file>
 
 <file path=ppt/notesSlides/notesSlide10.xml><?xml version="1.0" encoding="utf-8"?>
-<p:notes xmlns:a="http://schemas.openxmlformats.org/drawingml/2006/main" xmlns:r="http://schemas.openxmlformats.org/officeDocument/2006/relationships" xmlns:p="http://schemas.openxmlformats.org/presentationml/2006/main">
+<p:notes xmlns:a="http://schemas.openxmlformats.org/drawingml/2006/main" xmlns:ns2="http://schemas.microsoft.com/office/powerpoint/2010/main" xmlns:p="http://schemas.openxmlformats.org/presentationml/2006/main">
   <p:cSld>
     <p:spTree>
       <p:nvGrpSpPr>
@@ -425,7 +412,7 @@
           <a:bodyPr/>
           <a:lstStyle/>
           <a:p>
-            <a:endParaRPr lang="en-US" dirty="0"/>
+            <a:endParaRPr dirty="0"/>
           </a:p>
         </p:txBody>
       </p:sp>
@@ -455,7 +442,7 @@
     </p:spTree>
     <p:extLst>
       <p:ext uri="{BB962C8B-B14F-4D97-AF65-F5344CB8AC3E}">
-        <p14:creationId xmlns:p14="http://schemas.microsoft.com/office/powerpoint/2010/main" val="1024086991"/>
+        <ns2:creationId val="1024086991"/>
       </p:ext>
     </p:extLst>
   </p:cSld>
@@ -466,7 +453,7 @@
 </file>
 
 <file path=ppt/notesSlides/notesSlide11.xml><?xml version="1.0" encoding="utf-8"?>
-<p:notes xmlns:a="http://schemas.openxmlformats.org/drawingml/2006/main" xmlns:r="http://schemas.openxmlformats.org/officeDocument/2006/relationships" xmlns:p="http://schemas.openxmlformats.org/presentationml/2006/main">
+<p:notes xmlns:a="http://schemas.openxmlformats.org/drawingml/2006/main" xmlns:ns2="http://schemas.microsoft.com/office/powerpoint/2010/main" xmlns:p="http://schemas.openxmlformats.org/presentationml/2006/main">
   <p:cSld>
     <p:spTree>
       <p:nvGrpSpPr>
@@ -509,7 +496,7 @@
           <a:bodyPr/>
           <a:lstStyle/>
           <a:p>
-            <a:endParaRPr lang="en-US" dirty="0"/>
+            <a:endParaRPr dirty="0"/>
           </a:p>
         </p:txBody>
       </p:sp>
@@ -539,7 +526,7 @@
     </p:spTree>
     <p:extLst>
       <p:ext uri="{BB962C8B-B14F-4D97-AF65-F5344CB8AC3E}">
-        <p14:creationId xmlns:p14="http://schemas.microsoft.com/office/powerpoint/2010/main" val="1024086991"/>
+        <ns2:creationId val="1024086991"/>
       </p:ext>
     </p:extLst>
   </p:cSld>
@@ -550,7 +537,7 @@
 </file>
 
 <file path=ppt/notesSlides/notesSlide12.xml><?xml version="1.0" encoding="utf-8"?>
-<p:notes xmlns:a="http://schemas.openxmlformats.org/drawingml/2006/main" xmlns:r="http://schemas.openxmlformats.org/officeDocument/2006/relationships" xmlns:p="http://schemas.openxmlformats.org/presentationml/2006/main">
+<p:notes xmlns:a="http://schemas.openxmlformats.org/drawingml/2006/main" xmlns:ns2="http://schemas.microsoft.com/office/powerpoint/2010/main" xmlns:p="http://schemas.openxmlformats.org/presentationml/2006/main">
   <p:cSld>
     <p:spTree>
       <p:nvGrpSpPr>
@@ -593,7 +580,7 @@
           <a:bodyPr/>
           <a:lstStyle/>
           <a:p>
-            <a:endParaRPr lang="en-US" dirty="0"/>
+            <a:endParaRPr dirty="0"/>
           </a:p>
         </p:txBody>
       </p:sp>
@@ -623,7 +610,7 @@
     </p:spTree>
     <p:extLst>
       <p:ext uri="{BB962C8B-B14F-4D97-AF65-F5344CB8AC3E}">
-        <p14:creationId xmlns:p14="http://schemas.microsoft.com/office/powerpoint/2010/main" val="1024086991"/>
+        <ns2:creationId val="1024086991"/>
       </p:ext>
     </p:extLst>
   </p:cSld>
@@ -634,7 +621,7 @@
 </file>
 
 <file path=ppt/notesSlides/notesSlide13.xml><?xml version="1.0" encoding="utf-8"?>
-<p:notes xmlns:a="http://schemas.openxmlformats.org/drawingml/2006/main" xmlns:r="http://schemas.openxmlformats.org/officeDocument/2006/relationships" xmlns:p="http://schemas.openxmlformats.org/presentationml/2006/main">
+<p:notes xmlns:a="http://schemas.openxmlformats.org/drawingml/2006/main" xmlns:ns2="http://schemas.microsoft.com/office/powerpoint/2010/main" xmlns:p="http://schemas.openxmlformats.org/presentationml/2006/main">
   <p:cSld>
     <p:spTree>
       <p:nvGrpSpPr>
@@ -677,7 +664,7 @@
           <a:bodyPr/>
           <a:lstStyle/>
           <a:p>
-            <a:endParaRPr lang="en-US" dirty="0"/>
+            <a:endParaRPr dirty="0"/>
           </a:p>
         </p:txBody>
       </p:sp>
@@ -707,7 +694,7 @@
     </p:spTree>
     <p:extLst>
       <p:ext uri="{BB962C8B-B14F-4D97-AF65-F5344CB8AC3E}">
-        <p14:creationId xmlns:p14="http://schemas.microsoft.com/office/powerpoint/2010/main" val="1024086991"/>
+        <ns2:creationId val="1024086991"/>
       </p:ext>
     </p:extLst>
   </p:cSld>
@@ -718,7 +705,7 @@
 </file>
 
 <file path=ppt/notesSlides/notesSlide14.xml><?xml version="1.0" encoding="utf-8"?>
-<p:notes xmlns:a="http://schemas.openxmlformats.org/drawingml/2006/main" xmlns:r="http://schemas.openxmlformats.org/officeDocument/2006/relationships" xmlns:p="http://schemas.openxmlformats.org/presentationml/2006/main">
+<p:notes xmlns:a="http://schemas.openxmlformats.org/drawingml/2006/main" xmlns:ns2="http://schemas.microsoft.com/office/powerpoint/2010/main" xmlns:p="http://schemas.openxmlformats.org/presentationml/2006/main">
   <p:cSld>
     <p:spTree>
       <p:nvGrpSpPr>
@@ -761,7 +748,7 @@
           <a:bodyPr/>
           <a:lstStyle/>
           <a:p>
-            <a:endParaRPr lang="en-US" dirty="0"/>
+            <a:endParaRPr dirty="0"/>
           </a:p>
         </p:txBody>
       </p:sp>
@@ -791,7 +778,7 @@
     </p:spTree>
     <p:extLst>
       <p:ext uri="{BB962C8B-B14F-4D97-AF65-F5344CB8AC3E}">
-        <p14:creationId xmlns:p14="http://schemas.microsoft.com/office/powerpoint/2010/main" val="1024086991"/>
+        <ns2:creationId val="1024086991"/>
       </p:ext>
     </p:extLst>
   </p:cSld>
@@ -802,7 +789,7 @@
 </file>
 
 <file path=ppt/notesSlides/notesSlide15.xml><?xml version="1.0" encoding="utf-8"?>
-<p:notes xmlns:a="http://schemas.openxmlformats.org/drawingml/2006/main" xmlns:r="http://schemas.openxmlformats.org/officeDocument/2006/relationships" xmlns:p="http://schemas.openxmlformats.org/presentationml/2006/main">
+<p:notes xmlns:a="http://schemas.openxmlformats.org/drawingml/2006/main" xmlns:ns2="http://schemas.microsoft.com/office/powerpoint/2010/main" xmlns:p="http://schemas.openxmlformats.org/presentationml/2006/main">
   <p:cSld>
     <p:spTree>
       <p:nvGrpSpPr>
@@ -845,7 +832,7 @@
           <a:bodyPr/>
           <a:lstStyle/>
           <a:p>
-            <a:endParaRPr lang="en-US" dirty="0"/>
+            <a:endParaRPr dirty="0"/>
           </a:p>
         </p:txBody>
       </p:sp>
@@ -875,7 +862,7 @@
     </p:spTree>
     <p:extLst>
       <p:ext uri="{BB962C8B-B14F-4D97-AF65-F5344CB8AC3E}">
-        <p14:creationId xmlns:p14="http://schemas.microsoft.com/office/powerpoint/2010/main" val="1024086991"/>
+        <ns2:creationId val="1024086991"/>
       </p:ext>
     </p:extLst>
   </p:cSld>
@@ -886,7 +873,7 @@
 </file>
 
 <file path=ppt/notesSlides/notesSlide16.xml><?xml version="1.0" encoding="utf-8"?>
-<p:notes xmlns:a="http://schemas.openxmlformats.org/drawingml/2006/main" xmlns:r="http://schemas.openxmlformats.org/officeDocument/2006/relationships" xmlns:p="http://schemas.openxmlformats.org/presentationml/2006/main">
+<p:notes xmlns:a="http://schemas.openxmlformats.org/drawingml/2006/main" xmlns:ns2="http://schemas.microsoft.com/office/powerpoint/2010/main" xmlns:p="http://schemas.openxmlformats.org/presentationml/2006/main">
   <p:cSld>
     <p:spTree>
       <p:nvGrpSpPr>
@@ -929,7 +916,7 @@
           <a:bodyPr/>
           <a:lstStyle/>
           <a:p>
-            <a:endParaRPr lang="en-US" dirty="0"/>
+            <a:endParaRPr dirty="0"/>
           </a:p>
         </p:txBody>
       </p:sp>
@@ -959,7 +946,7 @@
     </p:spTree>
     <p:extLst>
       <p:ext uri="{BB962C8B-B14F-4D97-AF65-F5344CB8AC3E}">
-        <p14:creationId xmlns:p14="http://schemas.microsoft.com/office/powerpoint/2010/main" val="1024086991"/>
+        <ns2:creationId val="1024086991"/>
       </p:ext>
     </p:extLst>
   </p:cSld>
@@ -970,7 +957,7 @@
 </file>
 
 <file path=ppt/notesSlides/notesSlide17.xml><?xml version="1.0" encoding="utf-8"?>
-<p:notes xmlns:a="http://schemas.openxmlformats.org/drawingml/2006/main" xmlns:r="http://schemas.openxmlformats.org/officeDocument/2006/relationships" xmlns:p="http://schemas.openxmlformats.org/presentationml/2006/main">
+<p:notes xmlns:a="http://schemas.openxmlformats.org/drawingml/2006/main" xmlns:ns2="http://schemas.microsoft.com/office/powerpoint/2010/main" xmlns:p="http://schemas.openxmlformats.org/presentationml/2006/main">
   <p:cSld>
     <p:spTree>
       <p:nvGrpSpPr>
@@ -1013,7 +1000,7 @@
           <a:bodyPr/>
           <a:lstStyle/>
           <a:p>
-            <a:endParaRPr lang="en-US" dirty="0"/>
+            <a:endParaRPr dirty="0"/>
           </a:p>
         </p:txBody>
       </p:sp>
@@ -1043,7 +1030,7 @@
     </p:spTree>
     <p:extLst>
       <p:ext uri="{BB962C8B-B14F-4D97-AF65-F5344CB8AC3E}">
-        <p14:creationId xmlns:p14="http://schemas.microsoft.com/office/powerpoint/2010/main" val="1024086991"/>
+        <ns2:creationId val="1024086991"/>
       </p:ext>
     </p:extLst>
   </p:cSld>
@@ -1054,7 +1041,7 @@
 </file>
 
 <file path=ppt/notesSlides/notesSlide18.xml><?xml version="1.0" encoding="utf-8"?>
-<p:notes xmlns:a="http://schemas.openxmlformats.org/drawingml/2006/main" xmlns:r="http://schemas.openxmlformats.org/officeDocument/2006/relationships" xmlns:p="http://schemas.openxmlformats.org/presentationml/2006/main">
+<p:notes xmlns:a="http://schemas.openxmlformats.org/drawingml/2006/main" xmlns:ns2="http://schemas.microsoft.com/office/powerpoint/2010/main" xmlns:p="http://schemas.openxmlformats.org/presentationml/2006/main">
   <p:cSld>
     <p:spTree>
       <p:nvGrpSpPr>
@@ -1097,7 +1084,7 @@
           <a:bodyPr/>
           <a:lstStyle/>
           <a:p>
-            <a:endParaRPr lang="en-US" dirty="0"/>
+            <a:endParaRPr dirty="0"/>
           </a:p>
         </p:txBody>
       </p:sp>
@@ -1127,7 +1114,7 @@
     </p:spTree>
     <p:extLst>
       <p:ext uri="{BB962C8B-B14F-4D97-AF65-F5344CB8AC3E}">
-        <p14:creationId xmlns:p14="http://schemas.microsoft.com/office/powerpoint/2010/main" val="1024086991"/>
+        <ns2:creationId val="1024086991"/>
       </p:ext>
     </p:extLst>
   </p:cSld>
@@ -1138,7 +1125,7 @@
 </file>
 
 <file path=ppt/notesSlides/notesSlide19.xml><?xml version="1.0" encoding="utf-8"?>
-<p:notes xmlns:a="http://schemas.openxmlformats.org/drawingml/2006/main" xmlns:r="http://schemas.openxmlformats.org/officeDocument/2006/relationships" xmlns:p="http://schemas.openxmlformats.org/presentationml/2006/main" showMasterSp="0" showMasterPhAnim="0">
+<p:notes xmlns:a="http://schemas.openxmlformats.org/drawingml/2006/main" xmlns:p="http://schemas.openxmlformats.org/presentationml/2006/main" showMasterSp="0" showMasterPhAnim="0">
   <p:cSld>
     <p:spTree>
       <p:nvGrpSpPr>
@@ -1234,20 +1221,7 @@
           </a:bodyPr>
           <a:lstStyle/>
           <a:p>
-            <a:pPr marL="0" lvl="0" indent="0" algn="l" rtl="0">
-              <a:lnSpc>
-                <a:spcPct val="100000"/>
-              </a:lnSpc>
-              <a:spcBef>
-                <a:spcPts val="0"/>
-              </a:spcBef>
-              <a:spcAft>
-                <a:spcPts val="0"/>
-              </a:spcAft>
-              <a:buSzPts val="1100"/>
-              <a:buNone/>
-            </a:pPr>
-            <a:endParaRPr/>
+            <a:endParaRPr dirty="0"/>
           </a:p>
         </p:txBody>
       </p:sp>
@@ -1260,7 +1234,7 @@
 </file>
 
 <file path=ppt/notesSlides/notesSlide2.xml><?xml version="1.0" encoding="utf-8"?>
-<p:notes xmlns:a="http://schemas.openxmlformats.org/drawingml/2006/main" xmlns:r="http://schemas.openxmlformats.org/officeDocument/2006/relationships" xmlns:p="http://schemas.openxmlformats.org/presentationml/2006/main">
+<p:notes xmlns:a="http://schemas.openxmlformats.org/drawingml/2006/main" xmlns:ns2="http://schemas.microsoft.com/office/powerpoint/2010/main" xmlns:p="http://schemas.openxmlformats.org/presentationml/2006/main">
   <p:cSld>
     <p:spTree>
       <p:nvGrpSpPr>
@@ -1303,7 +1277,7 @@
           <a:bodyPr/>
           <a:lstStyle/>
           <a:p>
-            <a:endParaRPr lang="en-US" dirty="0"/>
+            <a:endParaRPr dirty="0"/>
           </a:p>
         </p:txBody>
       </p:sp>
@@ -1333,7 +1307,7 @@
     </p:spTree>
     <p:extLst>
       <p:ext uri="{BB962C8B-B14F-4D97-AF65-F5344CB8AC3E}">
-        <p14:creationId xmlns:p14="http://schemas.microsoft.com/office/powerpoint/2010/main" val="1024086991"/>
+        <ns2:creationId val="1024086991"/>
       </p:ext>
     </p:extLst>
   </p:cSld>
@@ -1344,7 +1318,7 @@
 </file>
 
 <file path=ppt/notesSlides/notesSlide3.xml><?xml version="1.0" encoding="utf-8"?>
-<p:notes xmlns:a="http://schemas.openxmlformats.org/drawingml/2006/main" xmlns:r="http://schemas.openxmlformats.org/officeDocument/2006/relationships" xmlns:p="http://schemas.openxmlformats.org/presentationml/2006/main">
+<p:notes xmlns:a="http://schemas.openxmlformats.org/drawingml/2006/main" xmlns:ns2="http://schemas.microsoft.com/office/powerpoint/2010/main" xmlns:p="http://schemas.openxmlformats.org/presentationml/2006/main">
   <p:cSld>
     <p:spTree>
       <p:nvGrpSpPr>
@@ -1387,7 +1361,7 @@
           <a:bodyPr/>
           <a:lstStyle/>
           <a:p>
-            <a:endParaRPr lang="en-US" dirty="0"/>
+            <a:endParaRPr dirty="0"/>
           </a:p>
         </p:txBody>
       </p:sp>
@@ -1417,7 +1391,7 @@
     </p:spTree>
     <p:extLst>
       <p:ext uri="{BB962C8B-B14F-4D97-AF65-F5344CB8AC3E}">
-        <p14:creationId xmlns:p14="http://schemas.microsoft.com/office/powerpoint/2010/main" val="1024086991"/>
+        <ns2:creationId val="1024086991"/>
       </p:ext>
     </p:extLst>
   </p:cSld>
@@ -1428,7 +1402,7 @@
 </file>
 
 <file path=ppt/notesSlides/notesSlide4.xml><?xml version="1.0" encoding="utf-8"?>
-<p:notes xmlns:a="http://schemas.openxmlformats.org/drawingml/2006/main" xmlns:r="http://schemas.openxmlformats.org/officeDocument/2006/relationships" xmlns:p="http://schemas.openxmlformats.org/presentationml/2006/main">
+<p:notes xmlns:a="http://schemas.openxmlformats.org/drawingml/2006/main" xmlns:ns2="http://schemas.microsoft.com/office/powerpoint/2010/main" xmlns:p="http://schemas.openxmlformats.org/presentationml/2006/main">
   <p:cSld>
     <p:spTree>
       <p:nvGrpSpPr>
@@ -1471,7 +1445,7 @@
           <a:bodyPr/>
           <a:lstStyle/>
           <a:p>
-            <a:endParaRPr lang="en-US" dirty="0"/>
+            <a:endParaRPr dirty="0"/>
           </a:p>
         </p:txBody>
       </p:sp>
@@ -1501,7 +1475,7 @@
     </p:spTree>
     <p:extLst>
       <p:ext uri="{BB962C8B-B14F-4D97-AF65-F5344CB8AC3E}">
-        <p14:creationId xmlns:p14="http://schemas.microsoft.com/office/powerpoint/2010/main" val="1024086991"/>
+        <ns2:creationId val="1024086991"/>
       </p:ext>
     </p:extLst>
   </p:cSld>
@@ -1512,7 +1486,7 @@
 </file>
 
 <file path=ppt/notesSlides/notesSlide5.xml><?xml version="1.0" encoding="utf-8"?>
-<p:notes xmlns:a="http://schemas.openxmlformats.org/drawingml/2006/main" xmlns:r="http://schemas.openxmlformats.org/officeDocument/2006/relationships" xmlns:p="http://schemas.openxmlformats.org/presentationml/2006/main">
+<p:notes xmlns:a="http://schemas.openxmlformats.org/drawingml/2006/main" xmlns:ns2="http://schemas.microsoft.com/office/powerpoint/2010/main" xmlns:p="http://schemas.openxmlformats.org/presentationml/2006/main">
   <p:cSld>
     <p:spTree>
       <p:nvGrpSpPr>
@@ -1555,7 +1529,7 @@
           <a:bodyPr/>
           <a:lstStyle/>
           <a:p>
-            <a:endParaRPr lang="en-US" dirty="0"/>
+            <a:endParaRPr dirty="0"/>
           </a:p>
         </p:txBody>
       </p:sp>
@@ -1585,7 +1559,7 @@
     </p:spTree>
     <p:extLst>
       <p:ext uri="{BB962C8B-B14F-4D97-AF65-F5344CB8AC3E}">
-        <p14:creationId xmlns:p14="http://schemas.microsoft.com/office/powerpoint/2010/main" val="1024086991"/>
+        <ns2:creationId val="1024086991"/>
       </p:ext>
     </p:extLst>
   </p:cSld>
@@ -1596,7 +1570,7 @@
 </file>
 
 <file path=ppt/notesSlides/notesSlide6.xml><?xml version="1.0" encoding="utf-8"?>
-<p:notes xmlns:a="http://schemas.openxmlformats.org/drawingml/2006/main" xmlns:r="http://schemas.openxmlformats.org/officeDocument/2006/relationships" xmlns:p="http://schemas.openxmlformats.org/presentationml/2006/main">
+<p:notes xmlns:a="http://schemas.openxmlformats.org/drawingml/2006/main" xmlns:ns2="http://schemas.microsoft.com/office/powerpoint/2010/main" xmlns:p="http://schemas.openxmlformats.org/presentationml/2006/main">
   <p:cSld>
     <p:spTree>
       <p:nvGrpSpPr>
@@ -1639,7 +1613,7 @@
           <a:bodyPr/>
           <a:lstStyle/>
           <a:p>
-            <a:endParaRPr lang="en-US" dirty="0"/>
+            <a:endParaRPr dirty="0"/>
           </a:p>
         </p:txBody>
       </p:sp>
@@ -1669,7 +1643,7 @@
     </p:spTree>
     <p:extLst>
       <p:ext uri="{BB962C8B-B14F-4D97-AF65-F5344CB8AC3E}">
-        <p14:creationId xmlns:p14="http://schemas.microsoft.com/office/powerpoint/2010/main" val="1024086991"/>
+        <ns2:creationId val="1024086991"/>
       </p:ext>
     </p:extLst>
   </p:cSld>
@@ -1680,7 +1654,7 @@
 </file>
 
 <file path=ppt/notesSlides/notesSlide7.xml><?xml version="1.0" encoding="utf-8"?>
-<p:notes xmlns:a="http://schemas.openxmlformats.org/drawingml/2006/main" xmlns:r="http://schemas.openxmlformats.org/officeDocument/2006/relationships" xmlns:p="http://schemas.openxmlformats.org/presentationml/2006/main">
+<p:notes xmlns:a="http://schemas.openxmlformats.org/drawingml/2006/main" xmlns:ns2="http://schemas.microsoft.com/office/powerpoint/2010/main" xmlns:p="http://schemas.openxmlformats.org/presentationml/2006/main">
   <p:cSld>
     <p:spTree>
       <p:nvGrpSpPr>
@@ -1723,7 +1697,7 @@
           <a:bodyPr/>
           <a:lstStyle/>
           <a:p>
-            <a:endParaRPr lang="en-US" dirty="0"/>
+            <a:endParaRPr dirty="0"/>
           </a:p>
         </p:txBody>
       </p:sp>
@@ -1753,7 +1727,7 @@
     </p:spTree>
     <p:extLst>
       <p:ext uri="{BB962C8B-B14F-4D97-AF65-F5344CB8AC3E}">
-        <p14:creationId xmlns:p14="http://schemas.microsoft.com/office/powerpoint/2010/main" val="1024086991"/>
+        <ns2:creationId val="1024086991"/>
       </p:ext>
     </p:extLst>
   </p:cSld>
@@ -1764,7 +1738,7 @@
 </file>
 
 <file path=ppt/notesSlides/notesSlide8.xml><?xml version="1.0" encoding="utf-8"?>
-<p:notes xmlns:a="http://schemas.openxmlformats.org/drawingml/2006/main" xmlns:r="http://schemas.openxmlformats.org/officeDocument/2006/relationships" xmlns:p="http://schemas.openxmlformats.org/presentationml/2006/main">
+<p:notes xmlns:a="http://schemas.openxmlformats.org/drawingml/2006/main" xmlns:ns2="http://schemas.microsoft.com/office/powerpoint/2010/main" xmlns:p="http://schemas.openxmlformats.org/presentationml/2006/main">
   <p:cSld>
     <p:spTree>
       <p:nvGrpSpPr>
@@ -1807,7 +1781,7 @@
           <a:bodyPr/>
           <a:lstStyle/>
           <a:p>
-            <a:endParaRPr lang="en-US" dirty="0"/>
+            <a:endParaRPr dirty="0"/>
           </a:p>
         </p:txBody>
       </p:sp>
@@ -1837,7 +1811,7 @@
     </p:spTree>
     <p:extLst>
       <p:ext uri="{BB962C8B-B14F-4D97-AF65-F5344CB8AC3E}">
-        <p14:creationId xmlns:p14="http://schemas.microsoft.com/office/powerpoint/2010/main" val="1024086991"/>
+        <ns2:creationId val="1024086991"/>
       </p:ext>
     </p:extLst>
   </p:cSld>
@@ -1848,7 +1822,7 @@
 </file>
 
 <file path=ppt/notesSlides/notesSlide9.xml><?xml version="1.0" encoding="utf-8"?>
-<p:notes xmlns:a="http://schemas.openxmlformats.org/drawingml/2006/main" xmlns:r="http://schemas.openxmlformats.org/officeDocument/2006/relationships" xmlns:p="http://schemas.openxmlformats.org/presentationml/2006/main">
+<p:notes xmlns:a="http://schemas.openxmlformats.org/drawingml/2006/main" xmlns:ns2="http://schemas.microsoft.com/office/powerpoint/2010/main" xmlns:p="http://schemas.openxmlformats.org/presentationml/2006/main">
   <p:cSld>
     <p:spTree>
       <p:nvGrpSpPr>
@@ -1891,7 +1865,7 @@
           <a:bodyPr/>
           <a:lstStyle/>
           <a:p>
-            <a:endParaRPr lang="en-US" dirty="0"/>
+            <a:endParaRPr dirty="0"/>
           </a:p>
         </p:txBody>
       </p:sp>
@@ -1921,7 +1895,7 @@
     </p:spTree>
     <p:extLst>
       <p:ext uri="{BB962C8B-B14F-4D97-AF65-F5344CB8AC3E}">
-        <p14:creationId xmlns:p14="http://schemas.microsoft.com/office/powerpoint/2010/main" val="1024086991"/>
+        <ns2:creationId val="1024086991"/>
       </p:ext>
     </p:extLst>
   </p:cSld>
